--- a/classes/parte-3-estadistica-inferencial/189-doubleml-econml-ml-para-causalidad/clase-189-doubleml-econml-ml-para-causalidad-presentacion.pptx
+++ b/classes/parte-3-estadistica-inferencial/189-doubleml-econml-ml-para-causalidad/clase-189-doubleml-econml-ml-para-causalidad-presentacion.pptx
@@ -3272,7 +3272,7 @@
                 </a:solidFill>
                 <a:latin typeface="Segoe UI"/>
               </a:rPr>
-              <a:t>Parte: 3 — Estadística Inferencial y Causal · Fuente: Chernozhukov et al. (2018) DML + docs DoubleML + EconML.  Duración estimada: 95 min.</a:t>
+              <a:t>Parte: 3 — Estadística Inferencial y Causal · Fuente: Chernozhukov et al. (2018) DML + docs DoubleML + EconML.  Duración estimada: 95 min. · Nivel: Avanzado</a:t>
             </a:r>
           </a:p>
         </p:txBody>
@@ -3581,7 +3581,7 @@
                 </a:solidFill>
                 <a:latin typeface="Segoe UI"/>
               </a:rPr>
-              <a:t>Parte: 3 — Estadística Inferencial y Causal · Fuente: Chernozhukov et al. (2018) DML + docs DoubleML + EconML.  Duración estimada: 95 min.</a:t>
+              <a:t>Parte: 3 — Estadística Inferencial y Causal · Fuente: Chernozhukov et al. (2018) DML + docs DoubleML + EconML.  Duración estimada: 95 min. · Nivel: Avanzado</a:t>
             </a:r>
           </a:p>
         </p:txBody>
